--- a/presentation/Final/F1_Final_Presentation.pptx
+++ b/presentation/Final/F1_Final_Presentation.pptx
@@ -742,8 +742,8 @@
         </p:nvSpPr>
         <p:spPr>
           <a:xfrm>
-            <a:off x="0" y="0"/>
-            <a:ext cx="3000000" cy="3000000"/>
+            <a:off x="-1166813" y="0"/>
+            <a:ext cx="5334001" cy="3000375"/>
           </a:xfrm>
           <a:custGeom>
             <a:avLst/>
@@ -4994,7 +4994,7 @@
               <a:buNone/>
             </a:pPr>
             <a:r>
-              <a:rPr lang="en-US" sz="1100" b="1">
+              <a:rPr lang="en-US" sz="1100" b="1" dirty="0">
                 <a:solidFill>
                   <a:srgbClr val="FFFFFF"/>
                 </a:solidFill>
@@ -5006,7 +5006,7 @@
               <a:t>Date: </a:t>
             </a:r>
             <a:r>
-              <a:rPr lang="en-US" sz="1100">
+              <a:rPr lang="en-US" sz="1100" dirty="0">
                 <a:solidFill>
                   <a:srgbClr val="E8E0F0"/>
                 </a:solidFill>
@@ -5015,9 +5015,9 @@
                 <a:cs typeface="Calibri"/>
                 <a:sym typeface="Calibri"/>
               </a:rPr>
-              <a:t>February 2026</a:t>
+              <a:t>February – March 2026</a:t>
             </a:r>
-            <a:endParaRPr sz="1100">
+            <a:endParaRPr sz="1100" dirty="0">
               <a:solidFill>
                 <a:schemeClr val="dk1"/>
               </a:solidFill>
